--- a/hashing/misc/presentations/leetcode_560.pptx
+++ b/hashing/misc/presentations/leetcode_560.pptx
@@ -3270,7 +3270,7 @@
         <p:spPr>
           <a:xfrm>
             <a:off x="504000" y="226080"/>
-            <a:ext cx="9069840" cy="944640"/>
+            <a:ext cx="9069480" cy="944280"/>
           </a:xfrm>
           <a:prstGeom prst="rect">
             <a:avLst/>
@@ -3304,17 +3304,7 @@
                 <a:latin typeface="Arial"/>
                 <a:ea typeface="DejaVu Sans"/>
               </a:rPr>
-              <a:t>LeetCode #</a:t>
-            </a:r>
-            <a:r>
-              <a:rPr b="0" lang="en-US" sz="4400" spc="-1" strike="noStrike">
-                <a:solidFill>
-                  <a:srgbClr val="000000"/>
-                </a:solidFill>
-                <a:latin typeface="Arial"/>
-                <a:ea typeface="DejaVu Sans"/>
-              </a:rPr>
-              <a:t>560</a:t>
+              <a:t>LeetCode #560</a:t>
             </a:r>
             <a:endParaRPr b="0" lang="en-US" sz="4400" spc="-1" strike="noStrike">
               <a:latin typeface="Arial"/>
@@ -3331,7 +3321,7 @@
         <p:spPr>
           <a:xfrm>
             <a:off x="504000" y="1326600"/>
-            <a:ext cx="9069840" cy="3286440"/>
+            <a:ext cx="9069480" cy="3286080"/>
           </a:xfrm>
           <a:prstGeom prst="rect">
             <a:avLst/>
@@ -3352,7 +3342,11 @@
             <a:noAutofit/>
           </a:bodyPr>
           <a:p>
-            <a:pPr algn="ctr"/>
+            <a:pPr algn="ctr">
+              <a:lnSpc>
+                <a:spcPct val="100000"/>
+              </a:lnSpc>
+            </a:pPr>
             <a:r>
               <a:rPr b="0" lang="en-US" sz="4800" spc="-1" strike="noStrike">
                 <a:solidFill>
@@ -3363,12 +3357,8 @@
               </a:rPr>
               <a:t>Subarray Sum Equals K</a:t>
             </a:r>
-            <a:endParaRPr b="0" i="1" lang="en-US" sz="4800" spc="-1" strike="noStrike">
-              <a:solidFill>
-                <a:srgbClr val="5f826b"/>
-              </a:solidFill>
-              <a:latin typeface="JetBrains Mono"/>
-              <a:ea typeface="JetBrains Mono"/>
+            <a:endParaRPr b="0" lang="en-US" sz="4800" spc="-1" strike="noStrike">
+              <a:latin typeface="Arial"/>
             </a:endParaRPr>
           </a:p>
         </p:txBody>
@@ -3412,7 +3402,7 @@
         <p:spPr>
           <a:xfrm>
             <a:off x="1645920" y="1540800"/>
-            <a:ext cx="546840" cy="546840"/>
+            <a:ext cx="546480" cy="546480"/>
           </a:xfrm>
           <a:prstGeom prst="rect">
             <a:avLst/>
@@ -3467,7 +3457,7 @@
         <p:spPr>
           <a:xfrm>
             <a:off x="365760" y="1632240"/>
-            <a:ext cx="913320" cy="364680"/>
+            <a:ext cx="912960" cy="364320"/>
           </a:xfrm>
           <a:prstGeom prst="rect">
             <a:avLst/>
@@ -3518,7 +3508,7 @@
         <p:spPr>
           <a:xfrm>
             <a:off x="365760" y="2547360"/>
-            <a:ext cx="913320" cy="364680"/>
+            <a:ext cx="912960" cy="364320"/>
           </a:xfrm>
           <a:prstGeom prst="rect">
             <a:avLst/>
@@ -3597,7 +3587,7 @@
         <p:spPr>
           <a:xfrm>
             <a:off x="3657600" y="1645920"/>
-            <a:ext cx="913320" cy="364680"/>
+            <a:ext cx="912960" cy="364320"/>
           </a:xfrm>
           <a:prstGeom prst="rect">
             <a:avLst/>
@@ -3648,7 +3638,7 @@
         <p:spPr>
           <a:xfrm>
             <a:off x="327240" y="3749040"/>
-            <a:ext cx="4152600" cy="730800"/>
+            <a:ext cx="4152240" cy="730440"/>
           </a:xfrm>
           <a:prstGeom prst="rect">
             <a:avLst/>
@@ -3729,7 +3719,7 @@
         <p:spPr>
           <a:xfrm>
             <a:off x="504000" y="226080"/>
-            <a:ext cx="9069840" cy="944640"/>
+            <a:ext cx="9069480" cy="944280"/>
           </a:xfrm>
           <a:prstGeom prst="rect">
             <a:avLst/>
@@ -3780,7 +3770,7 @@
         <p:spPr>
           <a:xfrm>
             <a:off x="2193480" y="1540800"/>
-            <a:ext cx="546840" cy="546840"/>
+            <a:ext cx="546480" cy="546480"/>
           </a:xfrm>
           <a:prstGeom prst="rect">
             <a:avLst/>
@@ -3835,7 +3825,7 @@
         <p:spPr>
           <a:xfrm>
             <a:off x="2742120" y="1539720"/>
-            <a:ext cx="546840" cy="546840"/>
+            <a:ext cx="546480" cy="546480"/>
           </a:xfrm>
           <a:prstGeom prst="rect">
             <a:avLst/>
@@ -3890,7 +3880,7 @@
         <p:spPr>
           <a:xfrm>
             <a:off x="1645920" y="2469960"/>
-            <a:ext cx="546840" cy="546840"/>
+            <a:ext cx="546480" cy="546480"/>
           </a:xfrm>
           <a:prstGeom prst="rect">
             <a:avLst/>
@@ -3945,7 +3935,7 @@
         <p:spPr>
           <a:xfrm>
             <a:off x="2193480" y="2469960"/>
-            <a:ext cx="546840" cy="546840"/>
+            <a:ext cx="546480" cy="546480"/>
           </a:xfrm>
           <a:prstGeom prst="rect">
             <a:avLst/>
@@ -4000,7 +3990,7 @@
         <p:spPr>
           <a:xfrm>
             <a:off x="2742120" y="2468880"/>
-            <a:ext cx="546840" cy="546840"/>
+            <a:ext cx="546480" cy="546480"/>
           </a:xfrm>
           <a:prstGeom prst="rect">
             <a:avLst/>
@@ -4060,7 +4050,7 @@
         <p:spPr>
           <a:xfrm>
             <a:off x="1645920" y="1540800"/>
-            <a:ext cx="546840" cy="546840"/>
+            <a:ext cx="546480" cy="546480"/>
           </a:xfrm>
           <a:prstGeom prst="rect">
             <a:avLst/>
@@ -4115,7 +4105,7 @@
         <p:spPr>
           <a:xfrm>
             <a:off x="365760" y="1632240"/>
-            <a:ext cx="913320" cy="364680"/>
+            <a:ext cx="912960" cy="364320"/>
           </a:xfrm>
           <a:prstGeom prst="rect">
             <a:avLst/>
@@ -4166,7 +4156,7 @@
         <p:spPr>
           <a:xfrm>
             <a:off x="365760" y="2547360"/>
-            <a:ext cx="913320" cy="364680"/>
+            <a:ext cx="912960" cy="364320"/>
           </a:xfrm>
           <a:prstGeom prst="rect">
             <a:avLst/>
@@ -4245,7 +4235,7 @@
         <p:spPr>
           <a:xfrm>
             <a:off x="3657600" y="1645920"/>
-            <a:ext cx="913320" cy="364680"/>
+            <a:ext cx="912960" cy="364320"/>
           </a:xfrm>
           <a:prstGeom prst="rect">
             <a:avLst/>
@@ -4296,7 +4286,7 @@
         <p:spPr>
           <a:xfrm>
             <a:off x="327240" y="3749040"/>
-            <a:ext cx="4152600" cy="730800"/>
+            <a:ext cx="4152240" cy="730440"/>
           </a:xfrm>
           <a:prstGeom prst="rect">
             <a:avLst/>
@@ -4377,7 +4367,7 @@
         <p:spPr>
           <a:xfrm>
             <a:off x="504000" y="226080"/>
-            <a:ext cx="9069840" cy="944640"/>
+            <a:ext cx="9069480" cy="944280"/>
           </a:xfrm>
           <a:prstGeom prst="rect">
             <a:avLst/>
@@ -4428,7 +4418,7 @@
         <p:spPr>
           <a:xfrm>
             <a:off x="2193480" y="1540800"/>
-            <a:ext cx="546840" cy="546840"/>
+            <a:ext cx="546480" cy="546480"/>
           </a:xfrm>
           <a:prstGeom prst="rect">
             <a:avLst/>
@@ -4483,7 +4473,7 @@
         <p:spPr>
           <a:xfrm>
             <a:off x="2742120" y="1539720"/>
-            <a:ext cx="546840" cy="546840"/>
+            <a:ext cx="546480" cy="546480"/>
           </a:xfrm>
           <a:prstGeom prst="rect">
             <a:avLst/>
@@ -4538,7 +4528,7 @@
         <p:spPr>
           <a:xfrm>
             <a:off x="1645920" y="2469960"/>
-            <a:ext cx="546840" cy="546840"/>
+            <a:ext cx="546480" cy="546480"/>
           </a:xfrm>
           <a:prstGeom prst="rect">
             <a:avLst/>
@@ -4593,7 +4583,7 @@
         <p:spPr>
           <a:xfrm>
             <a:off x="2193480" y="2469960"/>
-            <a:ext cx="546840" cy="546840"/>
+            <a:ext cx="546480" cy="546480"/>
           </a:xfrm>
           <a:prstGeom prst="rect">
             <a:avLst/>
@@ -4648,7 +4638,7 @@
         <p:spPr>
           <a:xfrm>
             <a:off x="2742120" y="2468880"/>
-            <a:ext cx="546840" cy="546840"/>
+            <a:ext cx="546480" cy="546480"/>
           </a:xfrm>
           <a:prstGeom prst="rect">
             <a:avLst/>
@@ -4733,7 +4723,7 @@
         <p:spPr>
           <a:xfrm>
             <a:off x="1645920" y="1540800"/>
-            <a:ext cx="546840" cy="546840"/>
+            <a:ext cx="546480" cy="546480"/>
           </a:xfrm>
           <a:prstGeom prst="rect">
             <a:avLst/>
@@ -4788,7 +4778,7 @@
         <p:spPr>
           <a:xfrm>
             <a:off x="365760" y="1632240"/>
-            <a:ext cx="913320" cy="364680"/>
+            <a:ext cx="912960" cy="364320"/>
           </a:xfrm>
           <a:prstGeom prst="rect">
             <a:avLst/>
@@ -4839,7 +4829,7 @@
         <p:spPr>
           <a:xfrm>
             <a:off x="365760" y="2547360"/>
-            <a:ext cx="913320" cy="364680"/>
+            <a:ext cx="912960" cy="364320"/>
           </a:xfrm>
           <a:prstGeom prst="rect">
             <a:avLst/>
@@ -4918,7 +4908,7 @@
         <p:spPr>
           <a:xfrm>
             <a:off x="3657600" y="1645920"/>
-            <a:ext cx="913320" cy="364680"/>
+            <a:ext cx="912960" cy="364320"/>
           </a:xfrm>
           <a:prstGeom prst="rect">
             <a:avLst/>
@@ -4969,7 +4959,7 @@
         <p:spPr>
           <a:xfrm>
             <a:off x="327240" y="3749040"/>
-            <a:ext cx="6804360" cy="730800"/>
+            <a:ext cx="6804000" cy="730440"/>
           </a:xfrm>
           <a:prstGeom prst="rect">
             <a:avLst/>
@@ -5040,7 +5030,7 @@
         <p:spPr>
           <a:xfrm>
             <a:off x="504000" y="226080"/>
-            <a:ext cx="9069840" cy="944640"/>
+            <a:ext cx="9069480" cy="944280"/>
           </a:xfrm>
           <a:prstGeom prst="rect">
             <a:avLst/>
@@ -5091,7 +5081,7 @@
         <p:spPr>
           <a:xfrm>
             <a:off x="2193480" y="1540800"/>
-            <a:ext cx="546840" cy="546840"/>
+            <a:ext cx="546480" cy="546480"/>
           </a:xfrm>
           <a:prstGeom prst="rect">
             <a:avLst/>
@@ -5146,7 +5136,7 @@
         <p:spPr>
           <a:xfrm>
             <a:off x="2742120" y="1539720"/>
-            <a:ext cx="546840" cy="546840"/>
+            <a:ext cx="546480" cy="546480"/>
           </a:xfrm>
           <a:prstGeom prst="rect">
             <a:avLst/>
@@ -5201,7 +5191,7 @@
         <p:spPr>
           <a:xfrm>
             <a:off x="1644840" y="2468880"/>
-            <a:ext cx="546840" cy="546840"/>
+            <a:ext cx="546480" cy="546480"/>
           </a:xfrm>
           <a:prstGeom prst="rect">
             <a:avLst/>
@@ -5256,7 +5246,7 @@
         <p:spPr>
           <a:xfrm>
             <a:off x="2193480" y="2467800"/>
-            <a:ext cx="546840" cy="546840"/>
+            <a:ext cx="546480" cy="546480"/>
           </a:xfrm>
           <a:prstGeom prst="rect">
             <a:avLst/>
@@ -5341,7 +5331,7 @@
         <p:spPr>
           <a:xfrm>
             <a:off x="1645920" y="1540800"/>
-            <a:ext cx="546840" cy="546840"/>
+            <a:ext cx="546480" cy="546480"/>
           </a:xfrm>
           <a:prstGeom prst="rect">
             <a:avLst/>
@@ -5396,7 +5386,7 @@
         <p:spPr>
           <a:xfrm>
             <a:off x="365760" y="1632240"/>
-            <a:ext cx="913320" cy="364680"/>
+            <a:ext cx="912960" cy="364320"/>
           </a:xfrm>
           <a:prstGeom prst="rect">
             <a:avLst/>
@@ -5447,7 +5437,7 @@
         <p:spPr>
           <a:xfrm>
             <a:off x="365760" y="2547360"/>
-            <a:ext cx="913320" cy="364680"/>
+            <a:ext cx="912960" cy="364320"/>
           </a:xfrm>
           <a:prstGeom prst="rect">
             <a:avLst/>
@@ -5526,7 +5516,7 @@
         <p:spPr>
           <a:xfrm>
             <a:off x="327240" y="3749040"/>
-            <a:ext cx="6804360" cy="730800"/>
+            <a:ext cx="6804000" cy="730440"/>
           </a:xfrm>
           <a:prstGeom prst="rect">
             <a:avLst/>
@@ -5577,7 +5567,7 @@
         <p:spPr>
           <a:xfrm>
             <a:off x="504000" y="226080"/>
-            <a:ext cx="9069840" cy="944640"/>
+            <a:ext cx="9069480" cy="944280"/>
           </a:xfrm>
           <a:prstGeom prst="rect">
             <a:avLst/>
@@ -5628,7 +5618,7 @@
         <p:spPr>
           <a:xfrm>
             <a:off x="2193480" y="1540800"/>
-            <a:ext cx="546840" cy="546840"/>
+            <a:ext cx="546480" cy="546480"/>
           </a:xfrm>
           <a:prstGeom prst="rect">
             <a:avLst/>
@@ -5683,7 +5673,7 @@
         <p:spPr>
           <a:xfrm>
             <a:off x="1644840" y="2468880"/>
-            <a:ext cx="546840" cy="546840"/>
+            <a:ext cx="546480" cy="546480"/>
           </a:xfrm>
           <a:prstGeom prst="rect">
             <a:avLst/>
@@ -5738,7 +5728,7 @@
         <p:spPr>
           <a:xfrm>
             <a:off x="2193480" y="2467800"/>
-            <a:ext cx="546840" cy="546840"/>
+            <a:ext cx="546480" cy="546480"/>
           </a:xfrm>
           <a:prstGeom prst="rect">
             <a:avLst/>
@@ -5798,7 +5788,7 @@
         <p:spPr>
           <a:xfrm>
             <a:off x="1645920" y="1540800"/>
-            <a:ext cx="546840" cy="546840"/>
+            <a:ext cx="546480" cy="546480"/>
           </a:xfrm>
           <a:prstGeom prst="rect">
             <a:avLst/>
@@ -5853,7 +5843,7 @@
         <p:spPr>
           <a:xfrm>
             <a:off x="365760" y="1632240"/>
-            <a:ext cx="913320" cy="364680"/>
+            <a:ext cx="912960" cy="364320"/>
           </a:xfrm>
           <a:prstGeom prst="rect">
             <a:avLst/>
@@ -5904,7 +5894,7 @@
         <p:spPr>
           <a:xfrm>
             <a:off x="365760" y="2547360"/>
-            <a:ext cx="913320" cy="364680"/>
+            <a:ext cx="912960" cy="364320"/>
           </a:xfrm>
           <a:prstGeom prst="rect">
             <a:avLst/>
@@ -5983,7 +5973,7 @@
         <p:spPr>
           <a:xfrm>
             <a:off x="327240" y="3749040"/>
-            <a:ext cx="6804360" cy="730800"/>
+            <a:ext cx="6804000" cy="730440"/>
           </a:xfrm>
           <a:prstGeom prst="rect">
             <a:avLst/>
@@ -6034,7 +6024,7 @@
         <p:spPr>
           <a:xfrm>
             <a:off x="504000" y="226080"/>
-            <a:ext cx="9069840" cy="944640"/>
+            <a:ext cx="9069480" cy="944280"/>
           </a:xfrm>
           <a:prstGeom prst="rect">
             <a:avLst/>
@@ -6085,7 +6075,7 @@
         <p:spPr>
           <a:xfrm>
             <a:off x="2193480" y="1540800"/>
-            <a:ext cx="546840" cy="546840"/>
+            <a:ext cx="546480" cy="546480"/>
           </a:xfrm>
           <a:prstGeom prst="rect">
             <a:avLst/>
@@ -6140,7 +6130,7 @@
         <p:spPr>
           <a:xfrm>
             <a:off x="1644840" y="2468880"/>
-            <a:ext cx="546840" cy="546840"/>
+            <a:ext cx="546480" cy="546480"/>
           </a:xfrm>
           <a:prstGeom prst="rect">
             <a:avLst/>
@@ -6195,7 +6185,7 @@
         <p:spPr>
           <a:xfrm>
             <a:off x="2193480" y="2467800"/>
-            <a:ext cx="546840" cy="546840"/>
+            <a:ext cx="546480" cy="546480"/>
           </a:xfrm>
           <a:prstGeom prst="rect">
             <a:avLst/>
@@ -6279,8 +6269,8 @@
         </p:nvSpPr>
         <p:spPr>
           <a:xfrm>
-            <a:off x="529560" y="182880"/>
-            <a:ext cx="9069840" cy="944640"/>
+            <a:off x="529560" y="427320"/>
+            <a:ext cx="9069480" cy="487080"/>
           </a:xfrm>
           <a:prstGeom prst="rect">
             <a:avLst/>
@@ -6307,16 +6297,16 @@
               </a:lnSpc>
             </a:pPr>
             <a:r>
-              <a:rPr b="0" lang="en-US" sz="4400" spc="-1" strike="noStrike">
-                <a:solidFill>
-                  <a:srgbClr val="000000"/>
-                </a:solidFill>
-                <a:latin typeface="Arial"/>
-                <a:ea typeface="DejaVu Sans"/>
-              </a:rPr>
-              <a:t>Hash table count-value and value-count</a:t>
-            </a:r>
-            <a:endParaRPr b="0" lang="en-US" sz="4400" spc="-1" strike="noStrike">
+              <a:rPr b="0" lang="en-US" sz="3600" spc="-1" strike="noStrike">
+                <a:solidFill>
+                  <a:srgbClr val="000000"/>
+                </a:solidFill>
+                <a:latin typeface="Arial"/>
+                <a:ea typeface="DejaVu Sans"/>
+              </a:rPr>
+              <a:t>Prefix sum stored in a hash table</a:t>
+            </a:r>
+            <a:endParaRPr b="0" lang="en-US" sz="3600" spc="-1" strike="noStrike">
               <a:latin typeface="Arial"/>
             </a:endParaRPr>
           </a:p>
@@ -6330,8 +6320,8 @@
         </p:nvSpPr>
         <p:spPr>
           <a:xfrm>
-            <a:off x="183600" y="2233080"/>
-            <a:ext cx="9690840" cy="1057680"/>
+            <a:off x="185040" y="1097280"/>
+            <a:ext cx="9690480" cy="4389120"/>
           </a:xfrm>
           <a:prstGeom prst="rect">
             <a:avLst/>
@@ -6358,16 +6348,56 @@
               </a:lnSpc>
             </a:pPr>
             <a:r>
-              <a:rPr b="0" lang="en-US" sz="1800" spc="-1" strike="noStrike">
-                <a:solidFill>
-                  <a:srgbClr val="000000"/>
-                </a:solidFill>
-                <a:latin typeface="Arial"/>
-                <a:ea typeface="DejaVu Sans"/>
-              </a:rPr>
-              <a:t>To get the top k frequent elements, we first count the occurrences of all elements using a hash table. Then, we iterate through the hash table and use a heap to keep track of the k most frequent elements, popping the smallest one when the heap size exceeds k. Alternatively, we can use an array of size n + 1, where n is the size of the input array. In this approach, we store a list at each index of the array and append the i-th key to the list at the index corresponding to its frequency. Finally, we iterate through this array in reverse order to fill the result array.</a:t>
-            </a:r>
-            <a:endParaRPr b="0" lang="en-US" sz="1800" spc="-1" strike="noStrike">
+              <a:rPr b="0" lang="en-US" sz="1600" spc="-1" strike="noStrike">
+                <a:solidFill>
+                  <a:srgbClr val="000000"/>
+                </a:solidFill>
+                <a:latin typeface="Arial"/>
+                <a:ea typeface="DejaVu Sans"/>
+              </a:rPr>
+              <a:t>The first idea to solve this problem is a brute force approach. To achieve this we need to check every subarray in the input array using a loop and an inner loop that starts from i + 1 index. However, considering that the input array might have a size of up to 2 * 104. This give us Time Limit Exceeded(TLE) as the result since the total number of operation exceed 10</a:t>
+            </a:r>
+            <a:r>
+              <a:rPr b="0" lang="en-US" sz="1600" spc="-1" strike="noStrike" baseline="33000">
+                <a:solidFill>
+                  <a:srgbClr val="000000"/>
+                </a:solidFill>
+                <a:latin typeface="Arial"/>
+                <a:ea typeface="DejaVu Sans"/>
+              </a:rPr>
+              <a:t>8</a:t>
+            </a:r>
+            <a:r>
+              <a:rPr b="0" lang="en-US" sz="1600" spc="-1" strike="noStrike">
+                <a:solidFill>
+                  <a:srgbClr val="000000"/>
+                </a:solidFill>
+                <a:latin typeface="Arial"/>
+                <a:ea typeface="DejaVu Sans"/>
+              </a:rPr>
+              <a:t>. The next idea is to use a sliding window approach. But since the values in the array might be negative, it could lead to incorrect results. This is because sliding windows don’t guarantee that the sum will always increase or decrease consistently, which makes them unsuitable for this problem. However, we can optimize the brute force solution and reduce the time complexity from O(n</a:t>
+            </a:r>
+            <a:r>
+              <a:rPr b="0" lang="en-US" sz="1600" spc="-1" strike="noStrike" baseline="33000">
+                <a:solidFill>
+                  <a:srgbClr val="000000"/>
+                </a:solidFill>
+                <a:latin typeface="Arial"/>
+                <a:ea typeface="DejaVu Sans"/>
+              </a:rPr>
+              <a:t>2</a:t>
+            </a:r>
+            <a:r>
+              <a:rPr b="0" lang="en-US" sz="1600" spc="-1" strike="noStrike">
+                <a:solidFill>
+                  <a:srgbClr val="000000"/>
+                </a:solidFill>
+                <a:latin typeface="Arial"/>
+                <a:ea typeface="DejaVu Sans"/>
+              </a:rPr>
+              <a:t>) to O(n) by using a hash map. The hash map will store the prefix sums as keys and the count of occurrences of each prefix sum as values. We start by adding an empty prefix to the hash map. This is important because the empty prefix has a sum of zero and if the sum of some of the first elements equals k, we would miss this subarray if we don’t handle this base case. Then we iterate through the input array and accumulate sum of each element to a local variable. On each iteration we check whether sum – k exists in the hash map. If it does, we add the associated with sum – k to the result, since it indicates how many times a subarray sum has occurred up to that point. Also, on each iteration we increment the count of the current sum in the hash map. After the iteration, we return the result.</a:t>
+            </a:r>
+            <a:endParaRPr b="0" lang="en-US" sz="1600" spc="-1" strike="noStrike">
               <a:latin typeface="Arial"/>
             </a:endParaRPr>
           </a:p>
@@ -6412,7 +6442,7 @@
         <p:spPr>
           <a:xfrm>
             <a:off x="1645920" y="1540800"/>
-            <a:ext cx="546840" cy="546840"/>
+            <a:ext cx="546480" cy="546480"/>
           </a:xfrm>
           <a:prstGeom prst="rect">
             <a:avLst/>
@@ -6467,7 +6497,7 @@
         <p:spPr>
           <a:xfrm>
             <a:off x="2743200" y="1540800"/>
-            <a:ext cx="546840" cy="546840"/>
+            <a:ext cx="546480" cy="546480"/>
           </a:xfrm>
           <a:prstGeom prst="rect">
             <a:avLst/>
@@ -6522,7 +6552,7 @@
         <p:spPr>
           <a:xfrm>
             <a:off x="2194560" y="1540800"/>
-            <a:ext cx="546840" cy="546840"/>
+            <a:ext cx="546480" cy="546480"/>
           </a:xfrm>
           <a:prstGeom prst="rect">
             <a:avLst/>
@@ -6577,7 +6607,7 @@
         <p:spPr>
           <a:xfrm>
             <a:off x="3291840" y="1540800"/>
-            <a:ext cx="546840" cy="546840"/>
+            <a:ext cx="546480" cy="546480"/>
           </a:xfrm>
           <a:prstGeom prst="rect">
             <a:avLst/>
@@ -6632,7 +6662,7 @@
         <p:spPr>
           <a:xfrm>
             <a:off x="365760" y="1632240"/>
-            <a:ext cx="913320" cy="364680"/>
+            <a:ext cx="912960" cy="364320"/>
           </a:xfrm>
           <a:prstGeom prst="rect">
             <a:avLst/>
@@ -6683,7 +6713,7 @@
         <p:spPr>
           <a:xfrm>
             <a:off x="1645920" y="2455920"/>
-            <a:ext cx="1096560" cy="546840"/>
+            <a:ext cx="1096200" cy="546480"/>
           </a:xfrm>
           <a:prstGeom prst="rect">
             <a:avLst/>
@@ -6738,7 +6768,7 @@
         <p:spPr>
           <a:xfrm>
             <a:off x="2742120" y="2455920"/>
-            <a:ext cx="1096560" cy="546840"/>
+            <a:ext cx="1096200" cy="546480"/>
           </a:xfrm>
           <a:prstGeom prst="rect">
             <a:avLst/>
@@ -6793,7 +6823,7 @@
         <p:spPr>
           <a:xfrm>
             <a:off x="365760" y="2547360"/>
-            <a:ext cx="913320" cy="364680"/>
+            <a:ext cx="912960" cy="364320"/>
           </a:xfrm>
           <a:prstGeom prst="rect">
             <a:avLst/>
@@ -6872,7 +6902,7 @@
         <p:spPr>
           <a:xfrm>
             <a:off x="3839400" y="1541880"/>
-            <a:ext cx="546840" cy="546840"/>
+            <a:ext cx="546480" cy="546480"/>
           </a:xfrm>
           <a:prstGeom prst="rect">
             <a:avLst/>
@@ -6927,7 +6957,7 @@
         <p:spPr>
           <a:xfrm>
             <a:off x="4386960" y="1540800"/>
-            <a:ext cx="546840" cy="546840"/>
+            <a:ext cx="546480" cy="546480"/>
           </a:xfrm>
           <a:prstGeom prst="rect">
             <a:avLst/>
@@ -6982,7 +7012,7 @@
         <p:spPr>
           <a:xfrm>
             <a:off x="5395320" y="1632240"/>
-            <a:ext cx="913320" cy="364680"/>
+            <a:ext cx="912960" cy="364320"/>
           </a:xfrm>
           <a:prstGeom prst="rect">
             <a:avLst/>
@@ -7033,7 +7063,7 @@
         <p:spPr>
           <a:xfrm>
             <a:off x="1647000" y="3004920"/>
-            <a:ext cx="1096560" cy="546840"/>
+            <a:ext cx="1096200" cy="546480"/>
           </a:xfrm>
           <a:prstGeom prst="rect">
             <a:avLst/>
@@ -7088,7 +7118,7 @@
         <p:spPr>
           <a:xfrm>
             <a:off x="2743200" y="3004920"/>
-            <a:ext cx="1096560" cy="546840"/>
+            <a:ext cx="1096200" cy="546480"/>
           </a:xfrm>
           <a:prstGeom prst="rect">
             <a:avLst/>
@@ -7143,7 +7173,7 @@
         <p:spPr>
           <a:xfrm>
             <a:off x="1645920" y="3552480"/>
-            <a:ext cx="1096560" cy="546840"/>
+            <a:ext cx="1096200" cy="546480"/>
           </a:xfrm>
           <a:prstGeom prst="rect">
             <a:avLst/>
@@ -7173,7 +7203,7 @@
         <p:spPr>
           <a:xfrm>
             <a:off x="2742120" y="3552480"/>
-            <a:ext cx="1096560" cy="546840"/>
+            <a:ext cx="1096200" cy="546480"/>
           </a:xfrm>
           <a:prstGeom prst="rect">
             <a:avLst/>
@@ -7203,7 +7233,7 @@
         <p:spPr>
           <a:xfrm>
             <a:off x="1645920" y="4102200"/>
-            <a:ext cx="1096560" cy="546840"/>
+            <a:ext cx="1096200" cy="546480"/>
           </a:xfrm>
           <a:prstGeom prst="rect">
             <a:avLst/>
@@ -7233,7 +7263,7 @@
         <p:spPr>
           <a:xfrm>
             <a:off x="2742120" y="4102200"/>
-            <a:ext cx="1096560" cy="546840"/>
+            <a:ext cx="1096200" cy="546480"/>
           </a:xfrm>
           <a:prstGeom prst="rect">
             <a:avLst/>
@@ -7263,7 +7293,7 @@
         <p:spPr>
           <a:xfrm>
             <a:off x="327240" y="4924080"/>
-            <a:ext cx="3512520" cy="470160"/>
+            <a:ext cx="3512160" cy="469800"/>
           </a:xfrm>
           <a:prstGeom prst="rect">
             <a:avLst/>
@@ -7314,7 +7344,7 @@
         <p:spPr>
           <a:xfrm>
             <a:off x="504000" y="226080"/>
-            <a:ext cx="9069840" cy="944640"/>
+            <a:ext cx="9069480" cy="944280"/>
           </a:xfrm>
           <a:prstGeom prst="rect">
             <a:avLst/>
@@ -7395,7 +7425,7 @@
         <p:spPr>
           <a:xfrm>
             <a:off x="1645920" y="1540800"/>
-            <a:ext cx="546840" cy="546840"/>
+            <a:ext cx="546480" cy="546480"/>
           </a:xfrm>
           <a:prstGeom prst="rect">
             <a:avLst/>
@@ -7450,7 +7480,7 @@
         <p:spPr>
           <a:xfrm>
             <a:off x="2743200" y="1540800"/>
-            <a:ext cx="546840" cy="546840"/>
+            <a:ext cx="546480" cy="546480"/>
           </a:xfrm>
           <a:prstGeom prst="rect">
             <a:avLst/>
@@ -7505,7 +7535,7 @@
         <p:spPr>
           <a:xfrm>
             <a:off x="2194560" y="1540800"/>
-            <a:ext cx="546840" cy="546840"/>
+            <a:ext cx="546480" cy="546480"/>
           </a:xfrm>
           <a:prstGeom prst="rect">
             <a:avLst/>
@@ -7560,7 +7590,7 @@
         <p:spPr>
           <a:xfrm>
             <a:off x="3291840" y="1540800"/>
-            <a:ext cx="546840" cy="546840"/>
+            <a:ext cx="546480" cy="546480"/>
           </a:xfrm>
           <a:prstGeom prst="rect">
             <a:avLst/>
@@ -7615,7 +7645,7 @@
         <p:spPr>
           <a:xfrm>
             <a:off x="365760" y="1632240"/>
-            <a:ext cx="913320" cy="364680"/>
+            <a:ext cx="912960" cy="364320"/>
           </a:xfrm>
           <a:prstGeom prst="rect">
             <a:avLst/>
@@ -7666,7 +7696,7 @@
         <p:spPr>
           <a:xfrm>
             <a:off x="1645920" y="2455920"/>
-            <a:ext cx="1096560" cy="546840"/>
+            <a:ext cx="1096200" cy="546480"/>
           </a:xfrm>
           <a:prstGeom prst="rect">
             <a:avLst/>
@@ -7721,7 +7751,7 @@
         <p:spPr>
           <a:xfrm>
             <a:off x="2742120" y="2455920"/>
-            <a:ext cx="1096560" cy="546840"/>
+            <a:ext cx="1096200" cy="546480"/>
           </a:xfrm>
           <a:prstGeom prst="rect">
             <a:avLst/>
@@ -7776,7 +7806,7 @@
         <p:spPr>
           <a:xfrm>
             <a:off x="365760" y="2547360"/>
-            <a:ext cx="913320" cy="364680"/>
+            <a:ext cx="912960" cy="364320"/>
           </a:xfrm>
           <a:prstGeom prst="rect">
             <a:avLst/>
@@ -7855,7 +7885,7 @@
         <p:spPr>
           <a:xfrm>
             <a:off x="3839400" y="1541880"/>
-            <a:ext cx="546840" cy="546840"/>
+            <a:ext cx="546480" cy="546480"/>
           </a:xfrm>
           <a:prstGeom prst="rect">
             <a:avLst/>
@@ -7910,7 +7940,7 @@
         <p:spPr>
           <a:xfrm>
             <a:off x="4386960" y="1540800"/>
-            <a:ext cx="546840" cy="546840"/>
+            <a:ext cx="546480" cy="546480"/>
           </a:xfrm>
           <a:prstGeom prst="rect">
             <a:avLst/>
@@ -7965,7 +7995,7 @@
         <p:spPr>
           <a:xfrm>
             <a:off x="5395320" y="1632240"/>
-            <a:ext cx="913320" cy="364680"/>
+            <a:ext cx="912960" cy="364320"/>
           </a:xfrm>
           <a:prstGeom prst="rect">
             <a:avLst/>
@@ -8016,7 +8046,7 @@
         <p:spPr>
           <a:xfrm>
             <a:off x="1647000" y="3004920"/>
-            <a:ext cx="1096560" cy="546840"/>
+            <a:ext cx="1096200" cy="546480"/>
           </a:xfrm>
           <a:prstGeom prst="rect">
             <a:avLst/>
@@ -8071,7 +8101,7 @@
         <p:spPr>
           <a:xfrm>
             <a:off x="2743200" y="3004920"/>
-            <a:ext cx="1096560" cy="546840"/>
+            <a:ext cx="1096200" cy="546480"/>
           </a:xfrm>
           <a:prstGeom prst="rect">
             <a:avLst/>
@@ -8126,7 +8156,7 @@
         <p:spPr>
           <a:xfrm>
             <a:off x="1645920" y="3552480"/>
-            <a:ext cx="1096560" cy="546840"/>
+            <a:ext cx="1096200" cy="546480"/>
           </a:xfrm>
           <a:prstGeom prst="rect">
             <a:avLst/>
@@ -8156,7 +8186,7 @@
         <p:spPr>
           <a:xfrm>
             <a:off x="2742120" y="3552480"/>
-            <a:ext cx="1096560" cy="546840"/>
+            <a:ext cx="1096200" cy="546480"/>
           </a:xfrm>
           <a:prstGeom prst="rect">
             <a:avLst/>
@@ -8186,7 +8216,7 @@
         <p:spPr>
           <a:xfrm>
             <a:off x="1645920" y="4102200"/>
-            <a:ext cx="1096560" cy="546840"/>
+            <a:ext cx="1096200" cy="546480"/>
           </a:xfrm>
           <a:prstGeom prst="rect">
             <a:avLst/>
@@ -8216,7 +8246,7 @@
         <p:spPr>
           <a:xfrm>
             <a:off x="2742120" y="4102200"/>
-            <a:ext cx="1096560" cy="546840"/>
+            <a:ext cx="1096200" cy="546480"/>
           </a:xfrm>
           <a:prstGeom prst="rect">
             <a:avLst/>
@@ -8246,7 +8276,7 @@
         <p:spPr>
           <a:xfrm>
             <a:off x="327240" y="4924080"/>
-            <a:ext cx="3512520" cy="470160"/>
+            <a:ext cx="3512160" cy="469800"/>
           </a:xfrm>
           <a:prstGeom prst="rect">
             <a:avLst/>
@@ -8297,7 +8327,7 @@
         <p:spPr>
           <a:xfrm>
             <a:off x="504000" y="226080"/>
-            <a:ext cx="9069840" cy="944640"/>
+            <a:ext cx="9069480" cy="944280"/>
           </a:xfrm>
           <a:prstGeom prst="rect">
             <a:avLst/>
@@ -8378,7 +8408,7 @@
         <p:spPr>
           <a:xfrm>
             <a:off x="1645920" y="1540800"/>
-            <a:ext cx="546840" cy="546840"/>
+            <a:ext cx="546480" cy="546480"/>
           </a:xfrm>
           <a:prstGeom prst="rect">
             <a:avLst/>
@@ -8433,7 +8463,7 @@
         <p:spPr>
           <a:xfrm>
             <a:off x="2743200" y="1540800"/>
-            <a:ext cx="546840" cy="546840"/>
+            <a:ext cx="546480" cy="546480"/>
           </a:xfrm>
           <a:prstGeom prst="rect">
             <a:avLst/>
@@ -8488,7 +8518,7 @@
         <p:spPr>
           <a:xfrm>
             <a:off x="2194560" y="1540800"/>
-            <a:ext cx="546840" cy="546840"/>
+            <a:ext cx="546480" cy="546480"/>
           </a:xfrm>
           <a:prstGeom prst="rect">
             <a:avLst/>
@@ -8543,7 +8573,7 @@
         <p:spPr>
           <a:xfrm>
             <a:off x="3291840" y="1540800"/>
-            <a:ext cx="546840" cy="546840"/>
+            <a:ext cx="546480" cy="546480"/>
           </a:xfrm>
           <a:prstGeom prst="rect">
             <a:avLst/>
@@ -8598,7 +8628,7 @@
         <p:spPr>
           <a:xfrm>
             <a:off x="365760" y="1632240"/>
-            <a:ext cx="913320" cy="364680"/>
+            <a:ext cx="912960" cy="364320"/>
           </a:xfrm>
           <a:prstGeom prst="rect">
             <a:avLst/>
@@ -8649,7 +8679,7 @@
         <p:spPr>
           <a:xfrm>
             <a:off x="1645920" y="2455920"/>
-            <a:ext cx="1096560" cy="546840"/>
+            <a:ext cx="1096200" cy="546480"/>
           </a:xfrm>
           <a:prstGeom prst="rect">
             <a:avLst/>
@@ -8704,7 +8734,7 @@
         <p:spPr>
           <a:xfrm>
             <a:off x="2742120" y="2455920"/>
-            <a:ext cx="1096560" cy="546840"/>
+            <a:ext cx="1096200" cy="546480"/>
           </a:xfrm>
           <a:prstGeom prst="rect">
             <a:avLst/>
@@ -8759,7 +8789,7 @@
         <p:spPr>
           <a:xfrm>
             <a:off x="365760" y="2547360"/>
-            <a:ext cx="913320" cy="364680"/>
+            <a:ext cx="912960" cy="364320"/>
           </a:xfrm>
           <a:prstGeom prst="rect">
             <a:avLst/>
@@ -8838,7 +8868,7 @@
         <p:spPr>
           <a:xfrm>
             <a:off x="3839400" y="1541880"/>
-            <a:ext cx="546840" cy="546840"/>
+            <a:ext cx="546480" cy="546480"/>
           </a:xfrm>
           <a:prstGeom prst="rect">
             <a:avLst/>
@@ -8893,7 +8923,7 @@
         <p:spPr>
           <a:xfrm>
             <a:off x="4386960" y="1540800"/>
-            <a:ext cx="546840" cy="546840"/>
+            <a:ext cx="546480" cy="546480"/>
           </a:xfrm>
           <a:prstGeom prst="rect">
             <a:avLst/>
@@ -8948,7 +8978,7 @@
         <p:spPr>
           <a:xfrm>
             <a:off x="5395320" y="1632240"/>
-            <a:ext cx="913320" cy="364680"/>
+            <a:ext cx="912960" cy="364320"/>
           </a:xfrm>
           <a:prstGeom prst="rect">
             <a:avLst/>
@@ -8999,7 +9029,7 @@
         <p:spPr>
           <a:xfrm>
             <a:off x="1647000" y="3004920"/>
-            <a:ext cx="1096560" cy="546840"/>
+            <a:ext cx="1096200" cy="546480"/>
           </a:xfrm>
           <a:prstGeom prst="rect">
             <a:avLst/>
@@ -9054,7 +9084,7 @@
         <p:spPr>
           <a:xfrm>
             <a:off x="2743200" y="3004920"/>
-            <a:ext cx="1096560" cy="546840"/>
+            <a:ext cx="1096200" cy="546480"/>
           </a:xfrm>
           <a:prstGeom prst="rect">
             <a:avLst/>
@@ -9109,7 +9139,7 @@
         <p:spPr>
           <a:xfrm>
             <a:off x="1645920" y="3552480"/>
-            <a:ext cx="1096560" cy="546840"/>
+            <a:ext cx="1096200" cy="546480"/>
           </a:xfrm>
           <a:prstGeom prst="rect">
             <a:avLst/>
@@ -9139,7 +9169,7 @@
         <p:spPr>
           <a:xfrm>
             <a:off x="2742120" y="3552480"/>
-            <a:ext cx="1096560" cy="546840"/>
+            <a:ext cx="1096200" cy="546480"/>
           </a:xfrm>
           <a:prstGeom prst="rect">
             <a:avLst/>
@@ -9169,7 +9199,7 @@
         <p:spPr>
           <a:xfrm>
             <a:off x="1645920" y="4102200"/>
-            <a:ext cx="1096560" cy="546840"/>
+            <a:ext cx="1096200" cy="546480"/>
           </a:xfrm>
           <a:prstGeom prst="rect">
             <a:avLst/>
@@ -9199,7 +9229,7 @@
         <p:spPr>
           <a:xfrm>
             <a:off x="2742120" y="4102200"/>
-            <a:ext cx="1096560" cy="546840"/>
+            <a:ext cx="1096200" cy="546480"/>
           </a:xfrm>
           <a:prstGeom prst="rect">
             <a:avLst/>
@@ -9229,7 +9259,7 @@
         <p:spPr>
           <a:xfrm>
             <a:off x="327240" y="4924080"/>
-            <a:ext cx="3512520" cy="470160"/>
+            <a:ext cx="3512160" cy="469800"/>
           </a:xfrm>
           <a:prstGeom prst="rect">
             <a:avLst/>
@@ -9280,7 +9310,7 @@
         <p:spPr>
           <a:xfrm>
             <a:off x="504000" y="226080"/>
-            <a:ext cx="9069840" cy="944640"/>
+            <a:ext cx="9069480" cy="944280"/>
           </a:xfrm>
           <a:prstGeom prst="rect">
             <a:avLst/>
@@ -9361,7 +9391,7 @@
         <p:spPr>
           <a:xfrm>
             <a:off x="1645920" y="1540800"/>
-            <a:ext cx="546840" cy="546840"/>
+            <a:ext cx="546480" cy="546480"/>
           </a:xfrm>
           <a:prstGeom prst="rect">
             <a:avLst/>
@@ -9416,7 +9446,7 @@
         <p:spPr>
           <a:xfrm>
             <a:off x="2743200" y="1540800"/>
-            <a:ext cx="546840" cy="546840"/>
+            <a:ext cx="546480" cy="546480"/>
           </a:xfrm>
           <a:prstGeom prst="rect">
             <a:avLst/>
@@ -9471,7 +9501,7 @@
         <p:spPr>
           <a:xfrm>
             <a:off x="2194560" y="1540800"/>
-            <a:ext cx="546840" cy="546840"/>
+            <a:ext cx="546480" cy="546480"/>
           </a:xfrm>
           <a:prstGeom prst="rect">
             <a:avLst/>
@@ -9526,7 +9556,7 @@
         <p:spPr>
           <a:xfrm>
             <a:off x="3291840" y="1540800"/>
-            <a:ext cx="546840" cy="546840"/>
+            <a:ext cx="546480" cy="546480"/>
           </a:xfrm>
           <a:prstGeom prst="rect">
             <a:avLst/>
@@ -9581,7 +9611,7 @@
         <p:spPr>
           <a:xfrm>
             <a:off x="365760" y="1632240"/>
-            <a:ext cx="913320" cy="364680"/>
+            <a:ext cx="912960" cy="364320"/>
           </a:xfrm>
           <a:prstGeom prst="rect">
             <a:avLst/>
@@ -9632,7 +9662,7 @@
         <p:spPr>
           <a:xfrm>
             <a:off x="1645920" y="2455920"/>
-            <a:ext cx="1096560" cy="546840"/>
+            <a:ext cx="1096200" cy="546480"/>
           </a:xfrm>
           <a:prstGeom prst="rect">
             <a:avLst/>
@@ -9687,7 +9717,7 @@
         <p:spPr>
           <a:xfrm>
             <a:off x="2742120" y="2455920"/>
-            <a:ext cx="1096560" cy="546840"/>
+            <a:ext cx="1096200" cy="546480"/>
           </a:xfrm>
           <a:prstGeom prst="rect">
             <a:avLst/>
@@ -9742,7 +9772,7 @@
         <p:spPr>
           <a:xfrm>
             <a:off x="365760" y="2547360"/>
-            <a:ext cx="913320" cy="364680"/>
+            <a:ext cx="912960" cy="364320"/>
           </a:xfrm>
           <a:prstGeom prst="rect">
             <a:avLst/>
@@ -9821,7 +9851,7 @@
         <p:spPr>
           <a:xfrm>
             <a:off x="3839400" y="1541880"/>
-            <a:ext cx="546840" cy="546840"/>
+            <a:ext cx="546480" cy="546480"/>
           </a:xfrm>
           <a:prstGeom prst="rect">
             <a:avLst/>
@@ -9876,7 +9906,7 @@
         <p:spPr>
           <a:xfrm>
             <a:off x="4386960" y="1540800"/>
-            <a:ext cx="546840" cy="546840"/>
+            <a:ext cx="546480" cy="546480"/>
           </a:xfrm>
           <a:prstGeom prst="rect">
             <a:avLst/>
@@ -9931,7 +9961,7 @@
         <p:spPr>
           <a:xfrm>
             <a:off x="5395320" y="1632240"/>
-            <a:ext cx="913320" cy="364680"/>
+            <a:ext cx="912960" cy="364320"/>
           </a:xfrm>
           <a:prstGeom prst="rect">
             <a:avLst/>
@@ -9982,7 +10012,7 @@
         <p:spPr>
           <a:xfrm>
             <a:off x="1647000" y="3004920"/>
-            <a:ext cx="1096560" cy="546840"/>
+            <a:ext cx="1096200" cy="546480"/>
           </a:xfrm>
           <a:prstGeom prst="rect">
             <a:avLst/>
@@ -10037,7 +10067,7 @@
         <p:spPr>
           <a:xfrm>
             <a:off x="2743200" y="3004920"/>
-            <a:ext cx="1096560" cy="546840"/>
+            <a:ext cx="1096200" cy="546480"/>
           </a:xfrm>
           <a:prstGeom prst="rect">
             <a:avLst/>
@@ -10092,7 +10122,7 @@
         <p:spPr>
           <a:xfrm>
             <a:off x="1645920" y="3552480"/>
-            <a:ext cx="1096560" cy="546840"/>
+            <a:ext cx="1096200" cy="546480"/>
           </a:xfrm>
           <a:prstGeom prst="rect">
             <a:avLst/>
@@ -10147,7 +10177,7 @@
         <p:spPr>
           <a:xfrm>
             <a:off x="2742120" y="3552480"/>
-            <a:ext cx="1096560" cy="546840"/>
+            <a:ext cx="1096200" cy="546480"/>
           </a:xfrm>
           <a:prstGeom prst="rect">
             <a:avLst/>
@@ -10202,7 +10232,7 @@
         <p:spPr>
           <a:xfrm>
             <a:off x="1645920" y="4102200"/>
-            <a:ext cx="1096560" cy="546840"/>
+            <a:ext cx="1096200" cy="546480"/>
           </a:xfrm>
           <a:prstGeom prst="rect">
             <a:avLst/>
@@ -10232,7 +10262,7 @@
         <p:spPr>
           <a:xfrm>
             <a:off x="2742120" y="4102200"/>
-            <a:ext cx="1096560" cy="546840"/>
+            <a:ext cx="1096200" cy="546480"/>
           </a:xfrm>
           <a:prstGeom prst="rect">
             <a:avLst/>
@@ -10262,7 +10292,7 @@
         <p:spPr>
           <a:xfrm>
             <a:off x="327240" y="4924080"/>
-            <a:ext cx="3512520" cy="470160"/>
+            <a:ext cx="3512160" cy="469800"/>
           </a:xfrm>
           <a:prstGeom prst="rect">
             <a:avLst/>
@@ -10313,7 +10343,7 @@
         <p:spPr>
           <a:xfrm>
             <a:off x="504000" y="226080"/>
-            <a:ext cx="9069840" cy="944640"/>
+            <a:ext cx="9069480" cy="944280"/>
           </a:xfrm>
           <a:prstGeom prst="rect">
             <a:avLst/>
@@ -10394,7 +10424,7 @@
         <p:spPr>
           <a:xfrm>
             <a:off x="1645920" y="1540800"/>
-            <a:ext cx="546840" cy="546840"/>
+            <a:ext cx="546480" cy="546480"/>
           </a:xfrm>
           <a:prstGeom prst="rect">
             <a:avLst/>
@@ -10449,7 +10479,7 @@
         <p:spPr>
           <a:xfrm>
             <a:off x="2743200" y="1540800"/>
-            <a:ext cx="546840" cy="546840"/>
+            <a:ext cx="546480" cy="546480"/>
           </a:xfrm>
           <a:prstGeom prst="rect">
             <a:avLst/>
@@ -10504,7 +10534,7 @@
         <p:spPr>
           <a:xfrm>
             <a:off x="2194560" y="1540800"/>
-            <a:ext cx="546840" cy="546840"/>
+            <a:ext cx="546480" cy="546480"/>
           </a:xfrm>
           <a:prstGeom prst="rect">
             <a:avLst/>
@@ -10559,7 +10589,7 @@
         <p:spPr>
           <a:xfrm>
             <a:off x="3291840" y="1540800"/>
-            <a:ext cx="546840" cy="546840"/>
+            <a:ext cx="546480" cy="546480"/>
           </a:xfrm>
           <a:prstGeom prst="rect">
             <a:avLst/>
@@ -10614,7 +10644,7 @@
         <p:spPr>
           <a:xfrm>
             <a:off x="365760" y="1632240"/>
-            <a:ext cx="913320" cy="364680"/>
+            <a:ext cx="912960" cy="364320"/>
           </a:xfrm>
           <a:prstGeom prst="rect">
             <a:avLst/>
@@ -10665,7 +10695,7 @@
         <p:spPr>
           <a:xfrm>
             <a:off x="1645920" y="2455920"/>
-            <a:ext cx="1096560" cy="546840"/>
+            <a:ext cx="1096200" cy="546480"/>
           </a:xfrm>
           <a:prstGeom prst="rect">
             <a:avLst/>
@@ -10720,7 +10750,7 @@
         <p:spPr>
           <a:xfrm>
             <a:off x="2742120" y="2455920"/>
-            <a:ext cx="1096560" cy="546840"/>
+            <a:ext cx="1096200" cy="546480"/>
           </a:xfrm>
           <a:prstGeom prst="rect">
             <a:avLst/>
@@ -10775,7 +10805,7 @@
         <p:spPr>
           <a:xfrm>
             <a:off x="365760" y="2547360"/>
-            <a:ext cx="913320" cy="364680"/>
+            <a:ext cx="912960" cy="364320"/>
           </a:xfrm>
           <a:prstGeom prst="rect">
             <a:avLst/>
@@ -10854,7 +10884,7 @@
         <p:spPr>
           <a:xfrm>
             <a:off x="3839400" y="1541880"/>
-            <a:ext cx="546840" cy="546840"/>
+            <a:ext cx="546480" cy="546480"/>
           </a:xfrm>
           <a:prstGeom prst="rect">
             <a:avLst/>
@@ -10909,7 +10939,7 @@
         <p:spPr>
           <a:xfrm>
             <a:off x="4386960" y="1540800"/>
-            <a:ext cx="546840" cy="546840"/>
+            <a:ext cx="546480" cy="546480"/>
           </a:xfrm>
           <a:prstGeom prst="rect">
             <a:avLst/>
@@ -10964,7 +10994,7 @@
         <p:spPr>
           <a:xfrm>
             <a:off x="5395320" y="1632240"/>
-            <a:ext cx="913320" cy="364680"/>
+            <a:ext cx="912960" cy="364320"/>
           </a:xfrm>
           <a:prstGeom prst="rect">
             <a:avLst/>
@@ -11015,7 +11045,7 @@
         <p:spPr>
           <a:xfrm>
             <a:off x="1647000" y="3004920"/>
-            <a:ext cx="1096560" cy="546840"/>
+            <a:ext cx="1096200" cy="546480"/>
           </a:xfrm>
           <a:prstGeom prst="rect">
             <a:avLst/>
@@ -11070,7 +11100,7 @@
         <p:spPr>
           <a:xfrm>
             <a:off x="2743200" y="3004920"/>
-            <a:ext cx="1096560" cy="546840"/>
+            <a:ext cx="1096200" cy="546480"/>
           </a:xfrm>
           <a:prstGeom prst="rect">
             <a:avLst/>
@@ -11125,7 +11155,7 @@
         <p:spPr>
           <a:xfrm>
             <a:off x="1645920" y="3552480"/>
-            <a:ext cx="1096560" cy="546840"/>
+            <a:ext cx="1096200" cy="546480"/>
           </a:xfrm>
           <a:prstGeom prst="rect">
             <a:avLst/>
@@ -11180,7 +11210,7 @@
         <p:spPr>
           <a:xfrm>
             <a:off x="2742120" y="3552480"/>
-            <a:ext cx="1096560" cy="546840"/>
+            <a:ext cx="1096200" cy="546480"/>
           </a:xfrm>
           <a:prstGeom prst="rect">
             <a:avLst/>
@@ -11235,7 +11265,7 @@
         <p:spPr>
           <a:xfrm>
             <a:off x="1645920" y="4102200"/>
-            <a:ext cx="1096560" cy="546840"/>
+            <a:ext cx="1096200" cy="546480"/>
           </a:xfrm>
           <a:prstGeom prst="rect">
             <a:avLst/>
@@ -11265,7 +11295,7 @@
         <p:spPr>
           <a:xfrm>
             <a:off x="2742120" y="4102200"/>
-            <a:ext cx="1096560" cy="546840"/>
+            <a:ext cx="1096200" cy="546480"/>
           </a:xfrm>
           <a:prstGeom prst="rect">
             <a:avLst/>
@@ -11295,7 +11325,7 @@
         <p:spPr>
           <a:xfrm>
             <a:off x="327240" y="4924080"/>
-            <a:ext cx="3512520" cy="470160"/>
+            <a:ext cx="3512160" cy="469800"/>
           </a:xfrm>
           <a:prstGeom prst="rect">
             <a:avLst/>
@@ -11346,7 +11376,7 @@
         <p:spPr>
           <a:xfrm>
             <a:off x="504000" y="226080"/>
-            <a:ext cx="9069840" cy="944640"/>
+            <a:ext cx="9069480" cy="944280"/>
           </a:xfrm>
           <a:prstGeom prst="rect">
             <a:avLst/>
@@ -11427,7 +11457,7 @@
         <p:spPr>
           <a:xfrm>
             <a:off x="1645920" y="1540800"/>
-            <a:ext cx="546840" cy="546840"/>
+            <a:ext cx="546480" cy="546480"/>
           </a:xfrm>
           <a:prstGeom prst="rect">
             <a:avLst/>
@@ -11482,7 +11512,7 @@
         <p:spPr>
           <a:xfrm>
             <a:off x="2743200" y="1540800"/>
-            <a:ext cx="546840" cy="546840"/>
+            <a:ext cx="546480" cy="546480"/>
           </a:xfrm>
           <a:prstGeom prst="rect">
             <a:avLst/>
@@ -11537,7 +11567,7 @@
         <p:spPr>
           <a:xfrm>
             <a:off x="2194560" y="1540800"/>
-            <a:ext cx="546840" cy="546840"/>
+            <a:ext cx="546480" cy="546480"/>
           </a:xfrm>
           <a:prstGeom prst="rect">
             <a:avLst/>
@@ -11592,7 +11622,7 @@
         <p:spPr>
           <a:xfrm>
             <a:off x="3291840" y="1540800"/>
-            <a:ext cx="546840" cy="546840"/>
+            <a:ext cx="546480" cy="546480"/>
           </a:xfrm>
           <a:prstGeom prst="rect">
             <a:avLst/>
@@ -11647,7 +11677,7 @@
         <p:spPr>
           <a:xfrm>
             <a:off x="365760" y="1632240"/>
-            <a:ext cx="913320" cy="364680"/>
+            <a:ext cx="912960" cy="364320"/>
           </a:xfrm>
           <a:prstGeom prst="rect">
             <a:avLst/>
@@ -11698,7 +11728,7 @@
         <p:spPr>
           <a:xfrm>
             <a:off x="1645920" y="2455920"/>
-            <a:ext cx="1096560" cy="546840"/>
+            <a:ext cx="1096200" cy="546480"/>
           </a:xfrm>
           <a:prstGeom prst="rect">
             <a:avLst/>
@@ -11753,7 +11783,7 @@
         <p:spPr>
           <a:xfrm>
             <a:off x="2742120" y="2455920"/>
-            <a:ext cx="1096560" cy="546840"/>
+            <a:ext cx="1096200" cy="546480"/>
           </a:xfrm>
           <a:prstGeom prst="rect">
             <a:avLst/>
@@ -11808,7 +11838,7 @@
         <p:spPr>
           <a:xfrm>
             <a:off x="365760" y="2547360"/>
-            <a:ext cx="913320" cy="364680"/>
+            <a:ext cx="912960" cy="364320"/>
           </a:xfrm>
           <a:prstGeom prst="rect">
             <a:avLst/>
@@ -11887,7 +11917,7 @@
         <p:spPr>
           <a:xfrm>
             <a:off x="3839400" y="1541880"/>
-            <a:ext cx="546840" cy="546840"/>
+            <a:ext cx="546480" cy="546480"/>
           </a:xfrm>
           <a:prstGeom prst="rect">
             <a:avLst/>
@@ -11942,7 +11972,7 @@
         <p:spPr>
           <a:xfrm>
             <a:off x="4386960" y="1540800"/>
-            <a:ext cx="546840" cy="546840"/>
+            <a:ext cx="546480" cy="546480"/>
           </a:xfrm>
           <a:prstGeom prst="rect">
             <a:avLst/>
@@ -11997,7 +12027,7 @@
         <p:spPr>
           <a:xfrm>
             <a:off x="5395320" y="1632240"/>
-            <a:ext cx="913320" cy="364680"/>
+            <a:ext cx="912960" cy="364320"/>
           </a:xfrm>
           <a:prstGeom prst="rect">
             <a:avLst/>
@@ -12048,7 +12078,7 @@
         <p:spPr>
           <a:xfrm>
             <a:off x="1647000" y="3004920"/>
-            <a:ext cx="1096560" cy="546840"/>
+            <a:ext cx="1096200" cy="546480"/>
           </a:xfrm>
           <a:prstGeom prst="rect">
             <a:avLst/>
@@ -12103,7 +12133,7 @@
         <p:spPr>
           <a:xfrm>
             <a:off x="2743200" y="3004920"/>
-            <a:ext cx="1096560" cy="546840"/>
+            <a:ext cx="1096200" cy="546480"/>
           </a:xfrm>
           <a:prstGeom prst="rect">
             <a:avLst/>
@@ -12158,7 +12188,7 @@
         <p:spPr>
           <a:xfrm>
             <a:off x="1645920" y="3552480"/>
-            <a:ext cx="1096560" cy="546840"/>
+            <a:ext cx="1096200" cy="546480"/>
           </a:xfrm>
           <a:prstGeom prst="rect">
             <a:avLst/>
@@ -12213,7 +12243,7 @@
         <p:spPr>
           <a:xfrm>
             <a:off x="2742120" y="3552480"/>
-            <a:ext cx="1096560" cy="546840"/>
+            <a:ext cx="1096200" cy="546480"/>
           </a:xfrm>
           <a:prstGeom prst="rect">
             <a:avLst/>
@@ -12268,7 +12298,7 @@
         <p:spPr>
           <a:xfrm>
             <a:off x="1645920" y="4102200"/>
-            <a:ext cx="1096560" cy="546840"/>
+            <a:ext cx="1096200" cy="546480"/>
           </a:xfrm>
           <a:prstGeom prst="rect">
             <a:avLst/>
@@ -12323,7 +12353,7 @@
         <p:spPr>
           <a:xfrm>
             <a:off x="2742120" y="4102200"/>
-            <a:ext cx="1096560" cy="546840"/>
+            <a:ext cx="1096200" cy="546480"/>
           </a:xfrm>
           <a:prstGeom prst="rect">
             <a:avLst/>
@@ -12378,7 +12408,7 @@
         <p:spPr>
           <a:xfrm>
             <a:off x="327240" y="4924080"/>
-            <a:ext cx="3512520" cy="470160"/>
+            <a:ext cx="3512160" cy="469800"/>
           </a:xfrm>
           <a:prstGeom prst="rect">
             <a:avLst/>
@@ -12429,7 +12459,7 @@
         <p:spPr>
           <a:xfrm>
             <a:off x="504000" y="226080"/>
-            <a:ext cx="9069840" cy="944640"/>
+            <a:ext cx="9069480" cy="944280"/>
           </a:xfrm>
           <a:prstGeom prst="rect">
             <a:avLst/>
@@ -12510,7 +12540,7 @@
         <p:spPr>
           <a:xfrm>
             <a:off x="1645920" y="1540800"/>
-            <a:ext cx="546840" cy="546840"/>
+            <a:ext cx="546480" cy="546480"/>
           </a:xfrm>
           <a:prstGeom prst="rect">
             <a:avLst/>
@@ -12565,7 +12595,7 @@
         <p:spPr>
           <a:xfrm>
             <a:off x="365760" y="1632240"/>
-            <a:ext cx="913320" cy="364680"/>
+            <a:ext cx="912960" cy="364320"/>
           </a:xfrm>
           <a:prstGeom prst="rect">
             <a:avLst/>
@@ -12616,7 +12646,7 @@
         <p:spPr>
           <a:xfrm>
             <a:off x="365760" y="2547360"/>
-            <a:ext cx="913320" cy="364680"/>
+            <a:ext cx="912960" cy="364320"/>
           </a:xfrm>
           <a:prstGeom prst="rect">
             <a:avLst/>
@@ -12695,7 +12725,7 @@
         <p:spPr>
           <a:xfrm>
             <a:off x="3657600" y="1645920"/>
-            <a:ext cx="913320" cy="364680"/>
+            <a:ext cx="912960" cy="364320"/>
           </a:xfrm>
           <a:prstGeom prst="rect">
             <a:avLst/>
@@ -12746,7 +12776,7 @@
         <p:spPr>
           <a:xfrm>
             <a:off x="327240" y="3749040"/>
-            <a:ext cx="4152600" cy="730800"/>
+            <a:ext cx="4152240" cy="730440"/>
           </a:xfrm>
           <a:prstGeom prst="rect">
             <a:avLst/>
@@ -12827,7 +12857,7 @@
         <p:spPr>
           <a:xfrm>
             <a:off x="504000" y="226080"/>
-            <a:ext cx="9069840" cy="944640"/>
+            <a:ext cx="9069480" cy="944280"/>
           </a:xfrm>
           <a:prstGeom prst="rect">
             <a:avLst/>
@@ -12878,7 +12908,7 @@
         <p:spPr>
           <a:xfrm>
             <a:off x="2193480" y="1540800"/>
-            <a:ext cx="546840" cy="546840"/>
+            <a:ext cx="546480" cy="546480"/>
           </a:xfrm>
           <a:prstGeom prst="rect">
             <a:avLst/>
@@ -12933,7 +12963,7 @@
         <p:spPr>
           <a:xfrm>
             <a:off x="2742120" y="1539720"/>
-            <a:ext cx="546840" cy="546840"/>
+            <a:ext cx="546480" cy="546480"/>
           </a:xfrm>
           <a:prstGeom prst="rect">
             <a:avLst/>
@@ -12988,7 +13018,7 @@
         <p:spPr>
           <a:xfrm>
             <a:off x="1645920" y="2469960"/>
-            <a:ext cx="546840" cy="546840"/>
+            <a:ext cx="546480" cy="546480"/>
           </a:xfrm>
           <a:prstGeom prst="rect">
             <a:avLst/>
@@ -13043,7 +13073,7 @@
         <p:spPr>
           <a:xfrm>
             <a:off x="2193480" y="2469960"/>
-            <a:ext cx="546840" cy="546840"/>
+            <a:ext cx="546480" cy="546480"/>
           </a:xfrm>
           <a:prstGeom prst="rect">
             <a:avLst/>
@@ -13073,7 +13103,7 @@
         <p:spPr>
           <a:xfrm>
             <a:off x="2742120" y="2468880"/>
-            <a:ext cx="546840" cy="546840"/>
+            <a:ext cx="546480" cy="546480"/>
           </a:xfrm>
           <a:prstGeom prst="rect">
             <a:avLst/>
